--- a/event/deck.pptx
+++ b/event/deck.pptx
@@ -5,16 +5,21 @@
     <p:sldMasterId id="2147483648" r:id="rId1"/>
   </p:sldMasterIdLst>
   <p:sldIdLst>
-    <p:sldId id="256" r:id="rId7"/>
-    <p:sldId id="257" r:id="rId9"/>
-    <p:sldId id="258" r:id="rId10"/>
-    <p:sldId id="259" r:id="rId11"/>
-    <p:sldId id="260" r:id="rId12"/>
-    <p:sldId id="261" r:id="rId13"/>
-    <p:sldId id="262" r:id="rId14"/>
-    <p:sldId id="263" r:id="rId15"/>
-    <p:sldId id="264" r:id="rId16"/>
-    <p:sldId id="265" r:id="rId17"/>
+    <p:sldId id="256" r:id="rId31"/>
+    <p:sldId id="257" r:id="rId32"/>
+    <p:sldId id="258" r:id="rId33"/>
+    <p:sldId id="259" r:id="rId34"/>
+    <p:sldId id="260" r:id="rId35"/>
+    <p:sldId id="261" r:id="rId36"/>
+    <p:sldId id="262" r:id="rId37"/>
+    <p:sldId id="263" r:id="rId38"/>
+    <p:sldId id="264" r:id="rId39"/>
+    <p:sldId id="265" r:id="rId40"/>
+    <p:sldId id="266" r:id="rId41"/>
+    <p:sldId id="267" r:id="rId42"/>
+    <p:sldId id="268" r:id="rId43"/>
+    <p:sldId id="269" r:id="rId44"/>
+    <p:sldId id="270" r:id="rId45"/>
   </p:sldIdLst>
   <p:sldSz cx="12192000" cy="6858000" type="screen4x3"/>
   <p:notesSz cx="6858000" cy="9144000"/>
@@ -511,7 +516,7 @@
           <a:lstStyle/>
           <a:p>
             <a:r>
-              <a:t>안녕하세요, 어니스트패밀리 사업성장연구소 대표 신형준입니다.</a:t>
+              <a:t>안녕하세요, 저희는 웹 및 앱 서비스 외주 제작을 하고 있는 어니스트패밀리라고 합니다.</a:t>
             </a:r>
           </a:p>
         </p:txBody>
@@ -581,7 +586,387 @@
           <a:lstStyle/>
           <a:p>
             <a:r>
-              <a:t>만들고 끝내지 않겠습니다. 감사합니다.</a:t>
+              <a:t>실제 케이스들을 소개드리겠습니다.</a:t>
+            </a:r>
+          </a:p>
+          <a:p/>
+          <a:p>
+            <a:r>
+              <a:t>123타이어는 기존의 문제점을 분석해 리뉴얼 후 리뉴얼한것을 고객들에게 알렸습니다.</a:t>
+            </a:r>
+          </a:p>
+          <a:p/>
+          <a:p>
+            <a:r>
+              <a:t>내 차에 맞는 타이어와 장착점까지 사이트에서 바로 찾는 맞춤 차량 조회를 만들었고, 챗GPT·퍼플렉시티 같은 AI 검색이 상품 정보를 바로 읽도록 바꿨습니다. 개선한 맞춤 차량 조회를 고객에게 알리는 마케팅도 함께 진행했습니다.</a:t>
+            </a:r>
+          </a:p>
+          <a:p/>
+          <a:p>
+            <a:r>
+              <a:t>리뉴얼 전후 1년을 비교했을 때 매출은 24.6%, 주문 수는 22.2% 늘었습니다.</a:t>
+            </a:r>
+          </a:p>
+        </p:txBody>
+      </p:sp>
+      <p:sp>
+        <p:nvSpPr>
+          <p:cNvPr id="4" name="Slide Number Placeholder 3"/>
+          <p:cNvSpPr>
+            <a:spLocks noGrp="1"/>
+          </p:cNvSpPr>
+          <p:nvPr>
+            <p:ph type="sldNum" idx="5" sz="quarter"/>
+          </p:nvPr>
+        </p:nvSpPr>
+        <p:spPr/>
+      </p:sp>
+    </p:spTree>
+  </p:cSld>
+  <p:clrMapOvr>
+    <a:masterClrMapping/>
+  </p:clrMapOvr>
+</p:notes>
+</file>
+
+<file path=ppt/notesSlides/notesSlide11.xml><?xml version="1.0" encoding="utf-8"?>
+<p:notes xmlns:a="http://schemas.openxmlformats.org/drawingml/2006/main" xmlns:p="http://schemas.openxmlformats.org/presentationml/2006/main" xmlns:r="http://schemas.openxmlformats.org/officeDocument/2006/relationships">
+  <p:cSld>
+    <p:spTree>
+      <p:nvGrpSpPr>
+        <p:cNvPr id="1" name=""/>
+        <p:cNvGrpSpPr/>
+        <p:nvPr/>
+      </p:nvGrpSpPr>
+      <p:grpSpPr>
+        <a:xfrm>
+          <a:off x="0" y="0"/>
+          <a:ext cx="0" cy="0"/>
+          <a:chOff x="0" y="0"/>
+          <a:chExt cx="0" cy="0"/>
+        </a:xfrm>
+      </p:grpSpPr>
+      <p:sp>
+        <p:nvSpPr>
+          <p:cNvPr id="2" name="Slide Image Placeholder 1"/>
+          <p:cNvSpPr>
+            <a:spLocks noGrp="1"/>
+          </p:cNvSpPr>
+          <p:nvPr>
+            <p:ph type="sldImg" idx="2"/>
+          </p:nvPr>
+        </p:nvSpPr>
+        <p:spPr/>
+      </p:sp>
+      <p:sp>
+        <p:nvSpPr>
+          <p:cNvPr id="3" name="Notes Placeholder 2"/>
+          <p:cNvSpPr>
+            <a:spLocks noGrp="1"/>
+          </p:cNvSpPr>
+          <p:nvPr>
+            <p:ph type="body" idx="3" sz="quarter"/>
+          </p:nvPr>
+        </p:nvSpPr>
+        <p:spPr/>
+        <p:txBody>
+          <a:bodyPr/>
+          <a:lstStyle/>
+          <a:p>
+            <a:r>
+              <a:t>뽀뽀뜨는 기존의 문제점을 분석해 개선 후 고객들에게 알렸습니다.</a:t>
+            </a:r>
+          </a:p>
+          <a:p/>
+          <a:p>
+            <a:r>
+              <a:t>광고로 들어온 신규 고객의 62%가 첫 구매 뒤 다시 사지 않는다는 걸 데이터에서 찾았습니다. 그래서 잘 먹는 메뉴부터 안내하는 첫 방문 팝업, 재구매율이 높은 메뉴 8가지만 모은 페이지, 사진 후기가 쌓이게 하는 리뷰 알림톡과 적립금을 만들었습니다.</a:t>
+            </a:r>
+          </a:p>
+          <a:p/>
+          <a:p>
+            <a:r>
+              <a:t>개선한 것을 고객들에게 알리기 위해 여러 가설로 광고 소재를 만들고, 마케팅 후 반응을 비교했습니다.</a:t>
+            </a:r>
+          </a:p>
+        </p:txBody>
+      </p:sp>
+      <p:sp>
+        <p:nvSpPr>
+          <p:cNvPr id="4" name="Slide Number Placeholder 3"/>
+          <p:cNvSpPr>
+            <a:spLocks noGrp="1"/>
+          </p:cNvSpPr>
+          <p:nvPr>
+            <p:ph type="sldNum" idx="5" sz="quarter"/>
+          </p:nvPr>
+        </p:nvSpPr>
+        <p:spPr/>
+      </p:sp>
+    </p:spTree>
+  </p:cSld>
+  <p:clrMapOvr>
+    <a:masterClrMapping/>
+  </p:clrMapOvr>
+</p:notes>
+</file>
+
+<file path=ppt/notesSlides/notesSlide12.xml><?xml version="1.0" encoding="utf-8"?>
+<p:notes xmlns:a="http://schemas.openxmlformats.org/drawingml/2006/main" xmlns:p="http://schemas.openxmlformats.org/presentationml/2006/main" xmlns:r="http://schemas.openxmlformats.org/officeDocument/2006/relationships">
+  <p:cSld>
+    <p:spTree>
+      <p:nvGrpSpPr>
+        <p:cNvPr id="1" name=""/>
+        <p:cNvGrpSpPr/>
+        <p:nvPr/>
+      </p:nvGrpSpPr>
+      <p:grpSpPr>
+        <a:xfrm>
+          <a:off x="0" y="0"/>
+          <a:ext cx="0" cy="0"/>
+          <a:chOff x="0" y="0"/>
+          <a:chExt cx="0" cy="0"/>
+        </a:xfrm>
+      </p:grpSpPr>
+      <p:sp>
+        <p:nvSpPr>
+          <p:cNvPr id="2" name="Slide Image Placeholder 1"/>
+          <p:cNvSpPr>
+            <a:spLocks noGrp="1"/>
+          </p:cNvSpPr>
+          <p:nvPr>
+            <p:ph type="sldImg" idx="2"/>
+          </p:nvPr>
+        </p:nvSpPr>
+        <p:spPr/>
+      </p:sp>
+      <p:sp>
+        <p:nvSpPr>
+          <p:cNvPr id="3" name="Notes Placeholder 2"/>
+          <p:cNvSpPr>
+            <a:spLocks noGrp="1"/>
+          </p:cNvSpPr>
+          <p:nvPr>
+            <p:ph type="body" idx="3" sz="quarter"/>
+          </p:nvPr>
+        </p:nvSpPr>
+        <p:spPr/>
+        <p:txBody>
+          <a:bodyPr/>
+          <a:lstStyle/>
+          <a:p>
+            <a:r>
+              <a:t>sat라는 시험에 대비하는 모의고사 시스템이었는데 신규 출시 후 정작 한국에서는 반응이 없었으나 마케팅 타겟을 늘려보니 동남아시아쪽 반응이 좋아서 그쪽으로 타케팅 집중하고 해당 나라에서 빠른 속도로 제공될 수 있게 서버 지역을 바꾸고 결제 시스템도 해외친화적으로 변경하였습니다.</a:t>
+            </a:r>
+          </a:p>
+        </p:txBody>
+      </p:sp>
+      <p:sp>
+        <p:nvSpPr>
+          <p:cNvPr id="4" name="Slide Number Placeholder 3"/>
+          <p:cNvSpPr>
+            <a:spLocks noGrp="1"/>
+          </p:cNvSpPr>
+          <p:nvPr>
+            <p:ph type="sldNum" idx="5" sz="quarter"/>
+          </p:nvPr>
+        </p:nvSpPr>
+        <p:spPr/>
+      </p:sp>
+    </p:spTree>
+  </p:cSld>
+  <p:clrMapOvr>
+    <a:masterClrMapping/>
+  </p:clrMapOvr>
+</p:notes>
+</file>
+
+<file path=ppt/notesSlides/notesSlide13.xml><?xml version="1.0" encoding="utf-8"?>
+<p:notes xmlns:a="http://schemas.openxmlformats.org/drawingml/2006/main" xmlns:p="http://schemas.openxmlformats.org/presentationml/2006/main" xmlns:r="http://schemas.openxmlformats.org/officeDocument/2006/relationships">
+  <p:cSld>
+    <p:spTree>
+      <p:nvGrpSpPr>
+        <p:cNvPr id="1" name=""/>
+        <p:cNvGrpSpPr/>
+        <p:nvPr/>
+      </p:nvGrpSpPr>
+      <p:grpSpPr>
+        <a:xfrm>
+          <a:off x="0" y="0"/>
+          <a:ext cx="0" cy="0"/>
+          <a:chOff x="0" y="0"/>
+          <a:chExt cx="0" cy="0"/>
+        </a:xfrm>
+      </p:grpSpPr>
+      <p:sp>
+        <p:nvSpPr>
+          <p:cNvPr id="2" name="Slide Image Placeholder 1"/>
+          <p:cNvSpPr>
+            <a:spLocks noGrp="1"/>
+          </p:cNvSpPr>
+          <p:nvPr>
+            <p:ph type="sldImg" idx="2"/>
+          </p:nvPr>
+        </p:nvSpPr>
+        <p:spPr/>
+      </p:sp>
+      <p:sp>
+        <p:nvSpPr>
+          <p:cNvPr id="3" name="Notes Placeholder 2"/>
+          <p:cNvSpPr>
+            <a:spLocks noGrp="1"/>
+          </p:cNvSpPr>
+          <p:nvPr>
+            <p:ph type="body" idx="3" sz="quarter"/>
+          </p:nvPr>
+        </p:nvSpPr>
+        <p:spPr/>
+        <p:txBody>
+          <a:bodyPr/>
+          <a:lstStyle/>
+          <a:p>
+            <a:r>
+              <a:t>내부적으로 기존 시스템이 많이 노후화돼 새로운것들을 수정, 추가하는것이 어렵다 판단하셔서 최신 기술스펙으로 바꾸고 디자인 리뉴얼만을 원하심. 리뉴얼 후 사실상 소비자들에게는 예쁜 디자인 외에는 제공되는 가치가 달라지는게 없으니 매출도 그대로</a:t>
+            </a:r>
+          </a:p>
+        </p:txBody>
+      </p:sp>
+      <p:sp>
+        <p:nvSpPr>
+          <p:cNvPr id="4" name="Slide Number Placeholder 3"/>
+          <p:cNvSpPr>
+            <a:spLocks noGrp="1"/>
+          </p:cNvSpPr>
+          <p:nvPr>
+            <p:ph type="sldNum" idx="5" sz="quarter"/>
+          </p:nvPr>
+        </p:nvSpPr>
+        <p:spPr/>
+      </p:sp>
+    </p:spTree>
+  </p:cSld>
+  <p:clrMapOvr>
+    <a:masterClrMapping/>
+  </p:clrMapOvr>
+</p:notes>
+</file>
+
+<file path=ppt/notesSlides/notesSlide14.xml><?xml version="1.0" encoding="utf-8"?>
+<p:notes xmlns:a="http://schemas.openxmlformats.org/drawingml/2006/main" xmlns:p="http://schemas.openxmlformats.org/presentationml/2006/main" xmlns:r="http://schemas.openxmlformats.org/officeDocument/2006/relationships">
+  <p:cSld>
+    <p:spTree>
+      <p:nvGrpSpPr>
+        <p:cNvPr id="1" name=""/>
+        <p:cNvGrpSpPr/>
+        <p:nvPr/>
+      </p:nvGrpSpPr>
+      <p:grpSpPr>
+        <a:xfrm>
+          <a:off x="0" y="0"/>
+          <a:ext cx="0" cy="0"/>
+          <a:chOff x="0" y="0"/>
+          <a:chExt cx="0" cy="0"/>
+        </a:xfrm>
+      </p:grpSpPr>
+      <p:sp>
+        <p:nvSpPr>
+          <p:cNvPr id="2" name="Slide Image Placeholder 1"/>
+          <p:cNvSpPr>
+            <a:spLocks noGrp="1"/>
+          </p:cNvSpPr>
+          <p:nvPr>
+            <p:ph type="sldImg" idx="2"/>
+          </p:nvPr>
+        </p:nvSpPr>
+        <p:spPr/>
+      </p:sp>
+      <p:sp>
+        <p:nvSpPr>
+          <p:cNvPr id="3" name="Notes Placeholder 2"/>
+          <p:cNvSpPr>
+            <a:spLocks noGrp="1"/>
+          </p:cNvSpPr>
+          <p:nvPr>
+            <p:ph type="body" idx="3" sz="quarter"/>
+          </p:nvPr>
+        </p:nvSpPr>
+        <p:spPr/>
+        <p:txBody>
+          <a:bodyPr/>
+          <a:lstStyle/>
+          <a:p>
+            <a:r>
+              <a:t>출시전에는 많은 회사들이 입점하고, 투자도 받을 수 있을거라 기대하셨지만 막상 출시 후 반응이 없자 금방 사업을 접으심</a:t>
+            </a:r>
+          </a:p>
+        </p:txBody>
+      </p:sp>
+      <p:sp>
+        <p:nvSpPr>
+          <p:cNvPr id="4" name="Slide Number Placeholder 3"/>
+          <p:cNvSpPr>
+            <a:spLocks noGrp="1"/>
+          </p:cNvSpPr>
+          <p:nvPr>
+            <p:ph type="sldNum" idx="5" sz="quarter"/>
+          </p:nvPr>
+        </p:nvSpPr>
+        <p:spPr/>
+      </p:sp>
+    </p:spTree>
+  </p:cSld>
+  <p:clrMapOvr>
+    <a:masterClrMapping/>
+  </p:clrMapOvr>
+</p:notes>
+</file>
+
+<file path=ppt/notesSlides/notesSlide15.xml><?xml version="1.0" encoding="utf-8"?>
+<p:notes xmlns:a="http://schemas.openxmlformats.org/drawingml/2006/main" xmlns:p="http://schemas.openxmlformats.org/presentationml/2006/main" xmlns:r="http://schemas.openxmlformats.org/officeDocument/2006/relationships">
+  <p:cSld>
+    <p:spTree>
+      <p:nvGrpSpPr>
+        <p:cNvPr id="1" name=""/>
+        <p:cNvGrpSpPr/>
+        <p:nvPr/>
+      </p:nvGrpSpPr>
+      <p:grpSpPr>
+        <a:xfrm>
+          <a:off x="0" y="0"/>
+          <a:ext cx="0" cy="0"/>
+          <a:chOff x="0" y="0"/>
+          <a:chExt cx="0" cy="0"/>
+        </a:xfrm>
+      </p:grpSpPr>
+      <p:sp>
+        <p:nvSpPr>
+          <p:cNvPr id="2" name="Slide Image Placeholder 1"/>
+          <p:cNvSpPr>
+            <a:spLocks noGrp="1"/>
+          </p:cNvSpPr>
+          <p:nvPr>
+            <p:ph type="sldImg" idx="2"/>
+          </p:nvPr>
+        </p:nvSpPr>
+        <p:spPr/>
+      </p:sp>
+      <p:sp>
+        <p:nvSpPr>
+          <p:cNvPr id="3" name="Notes Placeholder 2"/>
+          <p:cNvSpPr>
+            <a:spLocks noGrp="1"/>
+          </p:cNvSpPr>
+          <p:nvPr>
+            <p:ph type="body" idx="3" sz="quarter"/>
+          </p:nvPr>
+        </p:nvSpPr>
+        <p:spPr/>
+        <p:txBody>
+          <a:bodyPr/>
+          <a:lstStyle/>
+          <a:p>
+            <a:r>
+              <a:t>실제로 저희가 우리 회사에 무엇을 해줄 수 있는지 한번 들어나보고싶다 하시는분들은 “어니스트패밀리”로 편하게 문의 부탁드립니다. 감사합니다.</a:t>
             </a:r>
           </a:p>
         </p:txBody>
@@ -651,7 +1036,19 @@
           <a:lstStyle/>
           <a:p>
             <a:r>
-              <a:t>저희는 원래 외주 제작만 해 오던 업체입니다. 중견기업, 대기업, 관공서, 대학교 프로젝트뿐 아니라 스타트업들의 신규 사업 프로젝트도 많이 맡아 왔습니다.</a:t>
+              <a:t>저희는 원래 고객의 요구사항대로 제작만 하는 외주 개발사였습니다.</a:t>
+            </a:r>
+          </a:p>
+          <a:p/>
+          <a:p>
+            <a:r>
+              <a:t>중견기업, 대기업, 관공서, 대학교, 스타트업 등 다양한 규모의 업체들로부터 일을 받아 진행하고 있었습니다.</a:t>
+            </a:r>
+          </a:p>
+          <a:p/>
+          <a:p>
+            <a:r>
+              <a:t>한컴, 롯데, 현대글로비스의 프로젝트도 진행했습니다.</a:t>
             </a:r>
           </a:p>
         </p:txBody>
@@ -721,7 +1118,13 @@
           <a:lstStyle/>
           <a:p>
             <a:r>
-              <a:t>그런데 저희가 제작한 서비스들 대부분이 1년도 못 가 사업이 종료되는 경우를 많이 봤습니다. 준비는 오래 하는데, 정작 시작하고 나서는 얼마 못 가 포기하시는 거죠.</a:t>
+              <a:t>그런데 유독 스타트업, 신규 창업 하시는분들께서 의뢰주시는 프로젝트는 제작 후 6개월도 못가 문을 닫는걸 많이 봤고, 중소기업에서 의뢰주시는 리뉴얼 프로젝트도 출시 후 별다른 매출 변화가 없이 끝나는 케이스를 봤습니다.</a:t>
+            </a:r>
+          </a:p>
+          <a:p/>
+          <a:p>
+            <a:r>
+              <a:t>준비 과정은 열정적으로 오래 준비하시지만, 정작 세상에 내놓고 나서는 얼마 못가 포기하시는 경우를 많이 봤습니다.</a:t>
             </a:r>
           </a:p>
         </p:txBody>
@@ -791,7 +1194,7 @@
           <a:lstStyle/>
           <a:p>
             <a:r>
-              <a:t>사업은 플랫폼을 만들든, 상품을 만들든, 쇼핑몰을 만들든 만들면 끝이 아니라 그제서야 시작이고, 그 이후에 어떻게 사업을 알려 나가고 개선해 나가느냐가 중요한데요. 마케팅을 조금만 시도해 보고 안 된다 생각하고 그만두시고, 고객들의 행동 패턴이나 피드백에 귀 기울이지 않아 들어온 고객마저 놓치는 경우가 많았습니다. 저희가 보기에는 아직도 더 시도해 볼 게 많아 보였는데, 시도해 보지도 못하고 그만두는 게 안타깝다는 생각이 들었습니다.</a:t>
+              <a:t>그동안 여러 성공, 실패 케이스를 지켜본바로는 서비스던 쇼핑몰이던 사실 만들고나면 그제서야 시작입니다.</a:t>
             </a:r>
           </a:p>
         </p:txBody>
@@ -861,7 +1264,7 @@
           <a:lstStyle/>
           <a:p>
             <a:r>
-              <a:t>그래서 저희는 단순히 고객이 만들어 달라는 대로만 시스템을 만드는 개발 외주업체가 아니라, 제작 완료 후에 사업의 성장까지도 돕는 고객의 실행 파트너가 되고자 사업성장연구소라는 컨셉으로 파트너십 사업을 시작하게 됐습니다. 한 번 만들고 끝내는 게 아니라 버전 1, 버전 2, 버전 3 계속 발전시켜 나가고요. 시장은 예상대로 흘러가지 않으니까, 한 번에 큰 금액으로 계약하기보다 매월 구독으로 계획이 바뀌면 유연하게 같이 움직입니다.</a:t>
+              <a:t>출시 후 마케팅 조금 해보고 기대한 반응이 나오지 않는다고 그만둘게 아니라, 해당 프로젝트들을 소비할 소비자가 누구인지, 왜 소비할지에 대해 한 가지 가설이 아니라 여러 가설을 세워 가설별로 여러 소재를 제작해서 마케팅 후 반응을 봐야하고,</a:t>
             </a:r>
           </a:p>
         </p:txBody>
@@ -931,7 +1334,7 @@
           <a:lstStyle/>
           <a:p>
             <a:r>
-              <a:t>고객의 사업 성장을 돕기 위해 저희가 하는 일, 첫째는 시스템 개선을 위한 개발입니다. 123타이어는 내 차에 맞는 타이어와 장착점까지 사이트에서 바로 찾는 맞춤 차량 조회를 만들었고, 챗GPT 같은 AI 검색에도 잘 잡히도록 AI 검색 최적화까지 했습니다. 그 결과 리뉴얼 후 1년 매출이 24.6% 늘었습니다.</a:t>
+              <a:t>타사에서는 어떤것들을 하고 있는지 그중에서 우리가 도입해볼것은 무엇인지 인사이트를 끊임없이 수집해 개선해나가고, 이 개선한것들을 알리기 위해 다시 마케팅하고를 계속해서 반복해나가야 한다고 생각합니다.</a:t>
             </a:r>
           </a:p>
         </p:txBody>
@@ -1001,7 +1404,7 @@
           <a:lstStyle/>
           <a:p>
             <a:r>
-              <a:t>뽀뽀뜨는 광고로 들어온 신규 고객의 62%가 첫 구매 뒤 다시 사지 않는다는 걸 데이터에서 찾았습니다. 그래서 잘 먹는 메뉴부터 안내하는 첫 방문 팝업, 재구매율이 높은 메뉴 8가지만 모은 페이지, 사진 후기가 쌓이게 하는 리뷰 알림톡과 적립금을 만들었습니다.</a:t>
+              <a:t>그래서 저희는 고객분들께 진정한 가치를 제공하려면 어떻게 해야할가를 고민해본 결과 고객이만들어 달라는대로만 만드는 단순 외주가 아니라, 구상 단계에서부터 함께 하고 다 만든 뒤 사업의 성장까지도 돕는 실행 파트너가 되는것이 진정한 가치를 주는것이라 생각하고 사업성장연구소라는 컨셉으로 신사업을 진행하고 있습니다.</a:t>
             </a:r>
           </a:p>
         </p:txBody>
@@ -1071,7 +1474,7 @@
           <a:lstStyle/>
           <a:p>
             <a:r>
-              <a:t>둘째는 이렇게 개선한 것을 고객들에게 알리는 마케팅입니다. 광고는 감이 아니라 실험으로 합니다. 가설을 여러 개 세우고, 가설마다 소재를 따로 만들어 함께 내보내고, 성과를 숫자로 비교해 잘 되는 쪽에 예산을 옮깁니다. 지금 보시는 게 뽀뽀뜨 메타 광고용으로 실제 만든 소재입니다.</a:t>
+              <a:t>사업성장연구소는 기존과 다르게 초기 출시 과정에서는 힘을 빼고, 빠르게 1차 버전을 출시해 시장 반응을 보면서 고객과 내부 피드백을 반영해가며 계속 개선해나가면서 마케팅도 함께 하는식입니다. 한 번에 큰 계약을 하는 대신 월 구독형태로 매월 이번달의 우선순위를 같이 정해 진행하는 방식입니다.</a:t>
             </a:r>
           </a:p>
         </p:txBody>
@@ -1141,7 +1544,19 @@
           <a:lstStyle/>
           <a:p>
             <a:r>
-              <a:t>그래서 오늘 이 자리에서 '사업 분석 및 제안 받아보기'를 해 보셨으면 합니다. QR로 이메일과 연락처를 남겨 주시면 저희가 분석해서 제안을 드립니다. 다만 최대한 자세한 정보를 주실수록 좋습니다. 데이터를 볼 수 있으면 더 좋고, 대표님께서 생각해 두신 목표가 뭔지, 앞으로 뭘 해 보려고 준비하고 계신지 남겨 주세요.</a:t>
+              <a:t>이렇게 진행하는 이유는 다음과 같습니다.</a:t>
+            </a:r>
+          </a:p>
+          <a:p/>
+          <a:p>
+            <a:r>
+              <a:t>1. 막상 출시전에 여러 내용들을 예상하고 출시해도, 예상한바와는 다른 경우가 많습니다. 그래서 빠르게 출시해서 실전을 경험하고, 시장 반응을 보고 우선순위들을 정해나가는것을 추천드립니다.</a:t>
+            </a:r>
+          </a:p>
+          <a:p/>
+          <a:p>
+            <a:r>
+              <a:t>2. 처음에 힘을 많이 주면, 정작 출시후에 쓸 힘이 없습니다. 처음에 크게 단건계약을 하기보다 작게 시작해 출시 후 마케팅하고 제품을 개선하는것에 더 많은 힘을 주기를 추천드립니다.</a:t>
             </a:r>
           </a:p>
         </p:txBody>
@@ -4149,7 +4564,7 @@
       <p:grpSpPr/>
       <p:pic>
         <p:nvPicPr>
-          <p:cNvPr id="2" name="Picture 1" descr="slide-01.png"/>
+          <p:cNvPr id="2" name="Picture 1" descr="1. 회사 소개"/>
           <p:cNvPicPr>
             <a:picLocks noChangeAspect="1"/>
           </p:cNvPicPr>
@@ -4191,7 +4606,217 @@
       <p:grpSpPr/>
       <p:pic>
         <p:nvPicPr>
-          <p:cNvPr id="2" name="Picture 1" descr="slide-10.png"/>
+          <p:cNvPr id="2" name="Picture 1" descr="10. 성공 케이스 · 123타이어"/>
+          <p:cNvPicPr>
+            <a:picLocks noChangeAspect="1"/>
+          </p:cNvPicPr>
+          <p:nvPr/>
+        </p:nvPicPr>
+        <p:blipFill>
+          <a:blip r:embed="rId2"/>
+          <a:stretch>
+            <a:fillRect/>
+          </a:stretch>
+        </p:blipFill>
+        <p:spPr>
+          <a:xfrm>
+            <a:off x="0" y="0"/>
+            <a:ext cx="12192000" cy="6858000"/>
+          </a:xfrm>
+          <a:prstGeom prst="rect">
+            <a:avLst/>
+          </a:prstGeom>
+        </p:spPr>
+      </p:pic>
+    </p:spTree>
+  </p:cSld>
+  <p:clrMapOvr>
+    <a:masterClrMapping/>
+  </p:clrMapOvr>
+</p:sld>
+</file>
+
+<file path=ppt/slides/slide11.xml><?xml version="1.0" encoding="utf-8"?>
+<p:sld xmlns:a="http://schemas.openxmlformats.org/drawingml/2006/main" xmlns:p="http://schemas.openxmlformats.org/presentationml/2006/main" xmlns:r="http://schemas.openxmlformats.org/officeDocument/2006/relationships">
+  <p:cSld>
+    <p:spTree>
+      <p:nvGrpSpPr>
+        <p:cNvPr id="1" name=""/>
+        <p:cNvGrpSpPr/>
+        <p:nvPr/>
+      </p:nvGrpSpPr>
+      <p:grpSpPr/>
+      <p:pic>
+        <p:nvPicPr>
+          <p:cNvPr id="2" name="Picture 1" descr="11. 성공 케이스 · 뽀뽀뜨"/>
+          <p:cNvPicPr>
+            <a:picLocks noChangeAspect="1"/>
+          </p:cNvPicPr>
+          <p:nvPr/>
+        </p:nvPicPr>
+        <p:blipFill>
+          <a:blip r:embed="rId2"/>
+          <a:stretch>
+            <a:fillRect/>
+          </a:stretch>
+        </p:blipFill>
+        <p:spPr>
+          <a:xfrm>
+            <a:off x="0" y="0"/>
+            <a:ext cx="12192000" cy="6858000"/>
+          </a:xfrm>
+          <a:prstGeom prst="rect">
+            <a:avLst/>
+          </a:prstGeom>
+        </p:spPr>
+      </p:pic>
+    </p:spTree>
+  </p:cSld>
+  <p:clrMapOvr>
+    <a:masterClrMapping/>
+  </p:clrMapOvr>
+</p:sld>
+</file>
+
+<file path=ppt/slides/slide12.xml><?xml version="1.0" encoding="utf-8"?>
+<p:sld xmlns:a="http://schemas.openxmlformats.org/drawingml/2006/main" xmlns:p="http://schemas.openxmlformats.org/presentationml/2006/main" xmlns:r="http://schemas.openxmlformats.org/officeDocument/2006/relationships">
+  <p:cSld>
+    <p:spTree>
+      <p:nvGrpSpPr>
+        <p:cNvPr id="1" name=""/>
+        <p:cNvGrpSpPr/>
+        <p:nvPr/>
+      </p:nvGrpSpPr>
+      <p:grpSpPr/>
+      <p:pic>
+        <p:nvPicPr>
+          <p:cNvPr id="2" name="Picture 1" descr="12. 성공 케이스 · blueprep"/>
+          <p:cNvPicPr>
+            <a:picLocks noChangeAspect="1"/>
+          </p:cNvPicPr>
+          <p:nvPr/>
+        </p:nvPicPr>
+        <p:blipFill>
+          <a:blip r:embed="rId2"/>
+          <a:stretch>
+            <a:fillRect/>
+          </a:stretch>
+        </p:blipFill>
+        <p:spPr>
+          <a:xfrm>
+            <a:off x="0" y="0"/>
+            <a:ext cx="12192000" cy="6858000"/>
+          </a:xfrm>
+          <a:prstGeom prst="rect">
+            <a:avLst/>
+          </a:prstGeom>
+        </p:spPr>
+      </p:pic>
+    </p:spTree>
+  </p:cSld>
+  <p:clrMapOvr>
+    <a:masterClrMapping/>
+  </p:clrMapOvr>
+</p:sld>
+</file>
+
+<file path=ppt/slides/slide13.xml><?xml version="1.0" encoding="utf-8"?>
+<p:sld xmlns:a="http://schemas.openxmlformats.org/drawingml/2006/main" xmlns:p="http://schemas.openxmlformats.org/presentationml/2006/main" xmlns:r="http://schemas.openxmlformats.org/officeDocument/2006/relationships">
+  <p:cSld>
+    <p:spTree>
+      <p:nvGrpSpPr>
+        <p:cNvPr id="1" name=""/>
+        <p:cNvGrpSpPr/>
+        <p:nvPr/>
+      </p:nvGrpSpPr>
+      <p:grpSpPr/>
+      <p:pic>
+        <p:nvPicPr>
+          <p:cNvPr id="2" name="Picture 1" descr="13. 실패 케이스 · 꽃집 리뉴얼 (플라워119)"/>
+          <p:cNvPicPr>
+            <a:picLocks noChangeAspect="1"/>
+          </p:cNvPicPr>
+          <p:nvPr/>
+        </p:nvPicPr>
+        <p:blipFill>
+          <a:blip r:embed="rId2"/>
+          <a:stretch>
+            <a:fillRect/>
+          </a:stretch>
+        </p:blipFill>
+        <p:spPr>
+          <a:xfrm>
+            <a:off x="0" y="0"/>
+            <a:ext cx="12192000" cy="6858000"/>
+          </a:xfrm>
+          <a:prstGeom prst="rect">
+            <a:avLst/>
+          </a:prstGeom>
+        </p:spPr>
+      </p:pic>
+    </p:spTree>
+  </p:cSld>
+  <p:clrMapOvr>
+    <a:masterClrMapping/>
+  </p:clrMapOvr>
+</p:sld>
+</file>
+
+<file path=ppt/slides/slide14.xml><?xml version="1.0" encoding="utf-8"?>
+<p:sld xmlns:a="http://schemas.openxmlformats.org/drawingml/2006/main" xmlns:p="http://schemas.openxmlformats.org/presentationml/2006/main" xmlns:r="http://schemas.openxmlformats.org/officeDocument/2006/relationships">
+  <p:cSld>
+    <p:spTree>
+      <p:nvGrpSpPr>
+        <p:cNvPr id="1" name=""/>
+        <p:cNvGrpSpPr/>
+        <p:nvPr/>
+      </p:nvGrpSpPr>
+      <p:grpSpPr/>
+      <p:pic>
+        <p:nvPicPr>
+          <p:cNvPr id="2" name="Picture 1" descr="14. 실패 케이스 · 쇼츠 ott 플랫폼"/>
+          <p:cNvPicPr>
+            <a:picLocks noChangeAspect="1"/>
+          </p:cNvPicPr>
+          <p:nvPr/>
+        </p:nvPicPr>
+        <p:blipFill>
+          <a:blip r:embed="rId2"/>
+          <a:stretch>
+            <a:fillRect/>
+          </a:stretch>
+        </p:blipFill>
+        <p:spPr>
+          <a:xfrm>
+            <a:off x="0" y="0"/>
+            <a:ext cx="12192000" cy="6858000"/>
+          </a:xfrm>
+          <a:prstGeom prst="rect">
+            <a:avLst/>
+          </a:prstGeom>
+        </p:spPr>
+      </p:pic>
+    </p:spTree>
+  </p:cSld>
+  <p:clrMapOvr>
+    <a:masterClrMapping/>
+  </p:clrMapOvr>
+</p:sld>
+</file>
+
+<file path=ppt/slides/slide15.xml><?xml version="1.0" encoding="utf-8"?>
+<p:sld xmlns:a="http://schemas.openxmlformats.org/drawingml/2006/main" xmlns:p="http://schemas.openxmlformats.org/presentationml/2006/main" xmlns:r="http://schemas.openxmlformats.org/officeDocument/2006/relationships">
+  <p:cSld>
+    <p:spTree>
+      <p:nvGrpSpPr>
+        <p:cNvPr id="1" name=""/>
+        <p:cNvGrpSpPr/>
+        <p:nvPr/>
+      </p:nvGrpSpPr>
+      <p:grpSpPr/>
+      <p:pic>
+        <p:nvPicPr>
+          <p:cNvPr id="2" name="Picture 1" descr="15. 문의 및 마무리"/>
           <p:cNvPicPr>
             <a:picLocks noChangeAspect="1"/>
           </p:cNvPicPr>
@@ -4233,7 +4858,7 @@
       <p:grpSpPr/>
       <p:pic>
         <p:nvPicPr>
-          <p:cNvPr id="2" name="Picture 1" descr="slide-02.png"/>
+          <p:cNvPr id="2" name="Picture 1" descr="2. 외주 개발사로 쌓아 온 경험"/>
           <p:cNvPicPr>
             <a:picLocks noChangeAspect="1"/>
           </p:cNvPicPr>
@@ -4275,7 +4900,7 @@
       <p:grpSpPr/>
       <p:pic>
         <p:nvPicPr>
-          <p:cNvPr id="2" name="Picture 1" descr="slide-03.png"/>
+          <p:cNvPr id="2" name="Picture 1" descr="3. 출시 후에 마주한 현실"/>
           <p:cNvPicPr>
             <a:picLocks noChangeAspect="1"/>
           </p:cNvPicPr>
@@ -4317,7 +4942,7 @@
       <p:grpSpPr/>
       <p:pic>
         <p:nvPicPr>
-          <p:cNvPr id="2" name="Picture 1" descr="slide-04.png"/>
+          <p:cNvPr id="2" name="Picture 1" descr="4. 만들고 나면 그제서야 시작"/>
           <p:cNvPicPr>
             <a:picLocks noChangeAspect="1"/>
           </p:cNvPicPr>
@@ -4359,7 +4984,7 @@
       <p:grpSpPr/>
       <p:pic>
         <p:nvPicPr>
-          <p:cNvPr id="2" name="Picture 1" descr="slide-05.png"/>
+          <p:cNvPr id="2" name="Picture 1" descr="5. 여러 가설로 마케팅하기"/>
           <p:cNvPicPr>
             <a:picLocks noChangeAspect="1"/>
           </p:cNvPicPr>
@@ -4401,7 +5026,7 @@
       <p:grpSpPr/>
       <p:pic>
         <p:nvPicPr>
-          <p:cNvPr id="2" name="Picture 1" descr="slide-06.png"/>
+          <p:cNvPr id="2" name="Picture 1" descr="6. 개선하고, 다시 알리기"/>
           <p:cNvPicPr>
             <a:picLocks noChangeAspect="1"/>
           </p:cNvPicPr>
@@ -4443,7 +5068,7 @@
       <p:grpSpPr/>
       <p:pic>
         <p:nvPicPr>
-          <p:cNvPr id="2" name="Picture 1" descr="slide-07.png"/>
+          <p:cNvPr id="2" name="Picture 1" descr="7. 사업성장연구소"/>
           <p:cNvPicPr>
             <a:picLocks noChangeAspect="1"/>
           </p:cNvPicPr>
@@ -4485,7 +5110,7 @@
       <p:grpSpPr/>
       <p:pic>
         <p:nvPicPr>
-          <p:cNvPr id="2" name="Picture 1" descr="slide-08.png"/>
+          <p:cNvPr id="2" name="Picture 1" descr="8. 월 구독으로 함께 진행하는 방식"/>
           <p:cNvPicPr>
             <a:picLocks noChangeAspect="1"/>
           </p:cNvPicPr>
@@ -4527,7 +5152,7 @@
       <p:grpSpPr/>
       <p:pic>
         <p:nvPicPr>
-          <p:cNvPr id="2" name="Picture 1" descr="slide-09.png"/>
+          <p:cNvPr id="2" name="Picture 1" descr="9. 작게 시작하는 두 가지 이유"/>
           <p:cNvPicPr>
             <a:picLocks noChangeAspect="1"/>
           </p:cNvPicPr>

--- a/event/deck.pptx
+++ b/event/deck.pptx
@@ -516,7 +516,7 @@
           <a:lstStyle/>
           <a:p>
             <a:r>
-              <a:t>안녕하세요, 저희는 웹 및 앱 서비스 외주 제작을 하고 있는 어니스트패밀리라고 합니다.</a:t>
+              <a:t>안녕하세요, 저희는 웹 및 앱 서비스 제작 에이전시 어니스트패밀리라고 합니다.</a:t>
             </a:r>
           </a:p>
         </p:txBody>
@@ -592,19 +592,23 @@
           <a:p/>
           <a:p>
             <a:r>
-              <a:t>123타이어는 기존의 문제점을 분석해 리뉴얼 후 리뉴얼한것을 고객들에게 알렸습니다.</a:t>
+              <a:t>123타이어는 타이어 쇼핑몰을 운영하고 계셨고, 타이어라는 제품 특성상 고객이 자신의 차량에 맞는 타이어를 찾아서 구매하기가 힘들어 고객센터 문의량이 많았고, 타이어를 사면 끝이 아니라 장착점까지 고객이 찾아서 신청해야하는 번거로움이 있어 이탈률이 높았습니다. 그래서 저희는 이 문제점을 고객이 자신의 차량번호만 입력해도 해당 차량에 맞는 타이어들을 맞춤추천해주고, 구매과정에서 해당 타이어를 장착할 장착점을 고를 수 있게 하여 구매 프로세스를 대폭 개선하였습니다. 이후로도 리뉴얼 이후 내부 운영적으로 생산성을 높이고, 고객 피드백을 받아 끊임없이 개선하는 등 클라이언트분과 저희가 함께 노력한 결과 리뉴얼 후 연매출이 63억에서 79억으로 약 24%가 올랐습니다. 현재도 자동차 용품 쇼핑몰로의 확장 등 많은 개선을 준비중에 있습니다.</a:t>
             </a:r>
           </a:p>
           <a:p/>
           <a:p>
             <a:r>
-              <a:t>내 차에 맞는 타이어와 장착점까지 사이트에서 바로 찾는 맞춤 차량 조회를 만들었고, 챗GPT·퍼플렉시티 같은 AI 검색이 상품 정보를 바로 읽도록 바꿨습니다. 개선한 맞춤 차량 조회를 고객에게 알리는 마케팅도 함께 진행했습니다.</a:t>
-            </a:r>
-          </a:p>
-          <a:p/>
-          <a:p>
-            <a:r>
-              <a:t>리뉴얼 전후 1년을 비교했을 때 매출은 24.6%, 주문 수는 22.2% 늘었습니다.</a:t>
+              <a:t>[근거]</a:t>
+            </a:r>
+          </a:p>
+          <a:p>
+            <a:r>
+              <a:t>매출 비교 원본 2~3쪽: https://api.dashboard.honest-family.com/storage/uploads/2026/10/QumGXX8giKlaKLTvql0zyV4z.pdf</a:t>
+            </a:r>
+          </a:p>
+          <a:p>
+            <a:r>
+              <a:t>2024.9.9~2025.9.8 순매출 63.67억 원 / 2025.9.9~2026.9.8 순매출 79.31억 원. 24.6%는 반올림. 함께 진행한 개선 전후 비교이며 특정 기능의 단독 효과를 뜻하지 않음.</a:t>
             </a:r>
           </a:p>
         </p:txBody>
@@ -674,19 +678,28 @@
           <a:lstStyle/>
           <a:p>
             <a:r>
-              <a:t>뽀뽀뜨는 기존의 문제점을 분석해 개선 후 고객들에게 알렸습니다.</a:t>
+              <a:t>blueprep은 sat라는 미국 시험에 대비하는 모의고사 시스템이었는데 신규 출시 후 여러 학원에 b2b 판매 및 한국에서 sat 시험을 준비하는 학생들에게 잘 팔릴거라 예상했는데, 예상과 달리 반응이 없었고, 미국에서는 반응이 있을가 광고타겟을 글로벌하게 늘려보니 의외로 동남아시아에서 반응이 좋았습니다. 이후 해외 고객이 좀 더 쾌적하게 이용할 수 있도록 서비스 이용 환경과 결제시스템을 개선했습니다. 출시 초기인 2024년에는 영문 상품의 달러 표시 결제 성공 주문액이 상반기 3만 6,155달러에서 하반기 12만 8,545달러로 약 255.5% 늘었습니다. 현재도 단어장 추가, 시험 종류 신설 등 많은 개선을 준비중에 있습니다.</a:t>
             </a:r>
           </a:p>
           <a:p/>
           <a:p>
             <a:r>
-              <a:t>광고로 들어온 신규 고객의 62%가 첫 구매 뒤 다시 사지 않는다는 걸 데이터에서 찾았습니다. 그래서 잘 먹는 메뉴부터 안내하는 첫 방문 팝업, 재구매율이 높은 메뉴 8가지만 모은 페이지, 사진 후기가 쌓이게 하는 리뷰 알림톡과 적립금을 만들었습니다.</a:t>
-            </a:r>
-          </a:p>
-          <a:p/>
-          <a:p>
-            <a:r>
-              <a:t>개선한 것을 고객들에게 알리기 위해 여러 가설로 광고 소재를 만들고, 마케팅 후 반응을 비교했습니다.</a:t>
+              <a:t>[근거]</a:t>
+            </a:r>
+          </a:p>
+          <a:p>
+            <a:r>
+              <a:t>2026.10.24 읽기 전용 주문 집계: https://dashboard.honest-family.com/projects/61</a:t>
+            </a:r>
+          </a:p>
+          <a:p>
+            <a:r>
+              <a:t>2024년 상반기 대비 하반기 영문 상품 달러 표시 결제 성공 주문액. 관리자 제외, 원화 주문 별도. 결제사 외부 환불·정산 미대조. 원고의 첫해·다음해 및 원화 환산 금액은 확인된 집계와 달라 기간·단위를 바로잡음. 동남아시아 고객 반응은 대표가 전달한 경험. 해당 지역 서버 별도 개설은 확인되지 않아 해외 이용 환경 개선으로 표현. 확인된 서버는 미국 동부이며 결제별 적용 시점이 달라 결제 변경만의 성장 효과로 단정하지 않음.</a:t>
+            </a:r>
+          </a:p>
+          <a:p>
+            <a:r>
+              <a:t>실제 화면: https://blueprep.com/ / https://blueprep.com/practices/26</a:t>
             </a:r>
           </a:p>
         </p:txBody>
@@ -756,7 +769,29 @@
           <a:lstStyle/>
           <a:p>
             <a:r>
-              <a:t>sat라는 시험에 대비하는 모의고사 시스템이었는데 신규 출시 후 정작 한국에서는 반응이 없었으나 마케팅 타겟을 늘려보니 동남아시아쪽 반응이 좋아서 그쪽으로 타케팅 집중하고 해당 나라에서 빠른 속도로 제공될 수 있게 서버 지역을 바꾸고 결제 시스템도 해외친화적으로 변경하였습니다.</a:t>
+              <a:t>뽀뽀뜨는 최근에 진행하고 있는 유아반찬 쇼핑몰로, 현재 두가지 가설을 실험중에 있습니다.</a:t>
+            </a:r>
+          </a:p>
+          <a:p/>
+          <a:p>
+            <a:r>
+              <a:t>첫째는 구매패턴을 분석보니 신규고객이 첫구매 후 이탈하는 비율이 매우 높았고 이 중 특정 상품군들을 구매한 고객은 이탈 없이 재구매율을 높은것을 확인했습니다. 그래서 해당 상품군들을 따로 모아 별도 랜딩페이지를 만들어 홍보하고, 메인페이지에서도 해당 상품들이 잘 보이게 큐레이션 후 실제 재구매율이 높아지는지 모니터링 중입니다. 현재 해당 상품군들의 판매량이 약 37% 늘었지만 이게 과연 재구매까지로 이어져 실제 재구매율을 높이는지 3개월간 모니터링 예정입니다. 그리고 식단 기능을 넣어 엄마들이 스스로 상품을 찾아 헤매지 않게 직접 식단을 구성해 배송받기만 하면 되는 식단 기능을 개발중에 있습니다.</a:t>
+            </a:r>
+          </a:p>
+          <a:p/>
+          <a:p>
+            <a:r>
+              <a:t>[근거]</a:t>
+            </a:r>
+          </a:p>
+          <a:p>
+            <a:r>
+              <a:t>주문 보관본을 재계산한 2026.10.24 조사: https://dashboard.honest-family.com/issues/1066</a:t>
+            </a:r>
+          </a:p>
+          <a:p>
+            <a:r>
+              <a:t>추천 상품 8종의 2026.8.31~9.20 정상 3주 주간 평균 122.7개 대비 10.12~10.18 169개. 판매량 37.8% 증가. 회사 전체 매출·재구매율의 증가가 아님. 3개월 모니터링과 식단 기능은 대표가 전달한 계획.</a:t>
             </a:r>
           </a:p>
         </p:txBody>
@@ -826,7 +861,29 @@
           <a:lstStyle/>
           <a:p>
             <a:r>
-              <a:t>내부적으로 기존 시스템이 많이 노후화돼 새로운것들을 수정, 추가하는것이 어렵다 판단하셔서 최신 기술스펙으로 바꾸고 디자인 리뉴얼만을 원하심. 리뉴얼 후 사실상 소비자들에게는 예쁜 디자인 외에는 제공되는 가치가 달라지는게 없으니 매출도 그대로</a:t>
+              <a:t>둘째는, 저출산 시대에 타업체들은 어떻게 매출을 올리는가 인사이트를 쌓던중 아이들이 알아서 쪽쪽 빨아먹을 수 있는 요거트, 여행을 갈 때도 쉽게 챙겨갈 수 있는 실온 이유식 등 엄마들을 편하게 해주는 상품들이 먹힌다는 생각이 들어 진행중이던 광고소재를 아이 중심이 아니라 엄마들도 저녁밥이라도 편하게 준비해라, 여유를 되찾으라는 등의 엄마 중심의 소재를 추가했더니 해당 소재가 반응이 좋다는것을 확인했습니다. 이로 인해 제품에 숟가락과 함께 담을 수 있는 다회용 뚜껑을 제공해 밖에 나가서 먹이기도 편하고, 한번에 다 먹지 못해도 다시 보관하기 편하게 하는 제품 개발과 한팩만으로도 한끼를 간편하게 먹일 수 있는 레시피를 추가하고 전면에 내세우는 등 많은 개선을 준비중에 있습니다.</a:t>
+            </a:r>
+          </a:p>
+          <a:p/>
+          <a:p>
+            <a:r>
+              <a:t>아직 뽀뽀뜨는 뚜렷한 매출 상승은 없지만 가만히 있지 않고 끊임없이 개선하다보면 결국은 매출상승으로 돌아올것이라 기대하고 있습니다.</a:t>
+            </a:r>
+          </a:p>
+          <a:p/>
+          <a:p>
+            <a:r>
+              <a:t>[근거]</a:t>
+            </a:r>
+          </a:p>
+          <a:p>
+            <a:r>
+              <a:t>광고 운영 기록: https://app.notion.com/p/3ffd0aa7612a81baaf74d1df6881043b</a:t>
+            </a:r>
+          </a:p>
+          <a:p>
+            <a:r>
+              <a:t>소재 반응과 제품·레시피 계획은 대표가 전달한 설명. 다회용 뚜껑·레시피는 준비 중이며 출시 완료가 아님. 전체 매출의 뚜렷한 상승은 아직 확인되지 않음.</a:t>
             </a:r>
           </a:p>
         </p:txBody>
@@ -896,7 +953,13 @@
           <a:lstStyle/>
           <a:p>
             <a:r>
-              <a:t>출시전에는 많은 회사들이 입점하고, 투자도 받을 수 있을거라 기대하셨지만 막상 출시 후 반응이 없자 금방 사업을 접으심</a:t>
+              <a:t>앞서 저희가 소개드린 대표케이스들을 보시면 알겠지만 저희가 투입된다고 해서 모든 케이스들이 반드시 매출이 오른다고 약속 드릴 수는 없습니다. 하지만 현재 상태를 더 나은 상태로 바꾸고싶다면 가만히 있으면 안되고 계속해서 변화를 일으켜야 한다고 생각합니다.</a:t>
+            </a:r>
+          </a:p>
+          <a:p/>
+          <a:p>
+            <a:r>
+              <a:t>저희가 약속드릴 수 있는건 어떤 변화를 일으킬지를 같이 논의하고, 그 변화를 위한 실제 실행이 단발성으로 끝나지 않게, 지속적으로 끊임없이 실행될 수 있게 하는 조력자가 되는 것입니다.</a:t>
             </a:r>
           </a:p>
         </p:txBody>
@@ -966,7 +1029,7 @@
           <a:lstStyle/>
           <a:p>
             <a:r>
-              <a:t>실제로 저희가 우리 회사에 무엇을 해줄 수 있는지 한번 들어나보고싶다 하시는분들은 “어니스트패밀리”로 편하게 문의 부탁드립니다. 감사합니다.</a:t>
+              <a:t>실제로 저희가 우리 회사에 무엇을 해줄 수 있는지 들어보고 싶으신분들은 “어니스트패밀리”로 편하게 문의 부탁드립니다. 이상 발표 마치겠습니다 들어주셔서 감사합니다.</a:t>
             </a:r>
           </a:p>
         </p:txBody>
@@ -1036,7 +1099,7 @@
           <a:lstStyle/>
           <a:p>
             <a:r>
-              <a:t>저희는 원래 고객의 요구사항대로 제작만 하는 외주 개발사였습니다.</a:t>
+              <a:t>저희는 원래 고객의 요구사항대로 제작만 하는 외주 제작사였습니다.</a:t>
             </a:r>
           </a:p>
           <a:p/>
@@ -1118,13 +1181,7 @@
           <a:lstStyle/>
           <a:p>
             <a:r>
-              <a:t>그런데 유독 스타트업, 신규 창업 하시는분들께서 의뢰주시는 프로젝트는 제작 후 6개월도 못가 문을 닫는걸 많이 봤고, 중소기업에서 의뢰주시는 리뉴얼 프로젝트도 출시 후 별다른 매출 변화가 없이 끝나는 케이스를 봤습니다.</a:t>
-            </a:r>
-          </a:p>
-          <a:p/>
-          <a:p>
-            <a:r>
-              <a:t>준비 과정은 열정적으로 오래 준비하시지만, 정작 세상에 내놓고 나서는 얼마 못가 포기하시는 경우를 많이 봤습니다.</a:t>
+              <a:t>그런데 유독 스타트업에서 의뢰주시는 프로젝트는 제작 후 6개월도 못가 서비스를 종료하는 경우를 많이 봤고, 중소기업에서 의뢰주시는 리뉴얼 프로젝트도 출시 후 별다른 매출 변화가 없이 끝나는 케이스를 많이 봤습니다.</a:t>
             </a:r>
           </a:p>
         </p:txBody>
@@ -1194,7 +1251,7 @@
           <a:lstStyle/>
           <a:p>
             <a:r>
-              <a:t>그동안 여러 성공, 실패 케이스를 지켜본바로는 서비스던 쇼핑몰이던 사실 만들고나면 그제서야 시작입니다.</a:t>
+              <a:t>서비스던 쇼핑몰이던 사실 만들고나면 그제서야 시작인데 준비 과정은 열정적으로 오래 준비하시지만, 정작 세상에 내놓고 나서는 얼마 못가 그만두시는 케이스였습니다.</a:t>
             </a:r>
           </a:p>
         </p:txBody>
@@ -1334,7 +1391,7 @@
           <a:lstStyle/>
           <a:p>
             <a:r>
-              <a:t>타사에서는 어떤것들을 하고 있는지 그중에서 우리가 도입해볼것은 무엇인지 인사이트를 끊임없이 수집해 개선해나가고, 이 개선한것들을 알리기 위해 다시 마케팅하고를 계속해서 반복해나가야 한다고 생각합니다.</a:t>
+              <a:t>타사에서는 어떤것들을 하고 있는지 다른 분야더라도 우리 서비스나 제품에 도입해볼것은 무엇인지 인사이트를 끊임없이 수집해 개선해나가고, 이 개선한것들을 알리기 위해 다시 마케팅하고를 계속해서 반복해나가야 한다고 생각합니다.</a:t>
             </a:r>
           </a:p>
         </p:txBody>
@@ -1556,7 +1613,7 @@
           <a:p/>
           <a:p>
             <a:r>
-              <a:t>2. 처음에 힘을 많이 주면, 정작 출시후에 쓸 힘이 없습니다. 처음에 크게 단건계약을 하기보다 작게 시작해 출시 후 마케팅하고 제품을 개선하는것에 더 많은 힘을 주기를 추천드립니다.</a:t>
+              <a:t>2. 처음에 힘을 많이 주면, 정작 출시후에 쓸 힘이 없습니다. 처음에 크게 단건계약을 하기보다 작게 시작해 마케팅하고 제품을 개선하는것에 더 많은 힘을 주기를 추천드립니다.</a:t>
             </a:r>
           </a:p>
         </p:txBody>
@@ -4606,7 +4663,7 @@
       <p:grpSpPr/>
       <p:pic>
         <p:nvPicPr>
-          <p:cNvPr id="2" name="Picture 1" descr="10. 성공 케이스 · 123타이어"/>
+          <p:cNvPr id="2" name="Picture 1" descr="10. 123타이어 · 구매 과정과 연매출 변화"/>
           <p:cNvPicPr>
             <a:picLocks noChangeAspect="1"/>
           </p:cNvPicPr>
@@ -4648,7 +4705,7 @@
       <p:grpSpPr/>
       <p:pic>
         <p:nvPicPr>
-          <p:cNvPr id="2" name="Picture 1" descr="11. 성공 케이스 · 뽀뽀뜨"/>
+          <p:cNvPr id="2" name="Picture 1" descr="11. 블루프렙 · 해외 시장과 초기 성장"/>
           <p:cNvPicPr>
             <a:picLocks noChangeAspect="1"/>
           </p:cNvPicPr>
@@ -4690,7 +4747,7 @@
       <p:grpSpPr/>
       <p:pic>
         <p:nvPicPr>
-          <p:cNvPr id="2" name="Picture 1" descr="12. 성공 케이스 · blueprep"/>
+          <p:cNvPr id="2" name="Picture 1" descr="12. 뽀뽀뜨 · 재구매 가설 실험"/>
           <p:cNvPicPr>
             <a:picLocks noChangeAspect="1"/>
           </p:cNvPicPr>
@@ -4732,7 +4789,7 @@
       <p:grpSpPr/>
       <p:pic>
         <p:nvPicPr>
-          <p:cNvPr id="2" name="Picture 1" descr="13. 실패 케이스 · 꽃집 리뉴얼 (플라워119)"/>
+          <p:cNvPr id="2" name="Picture 1" descr="13. 뽀뽀뜨 · 엄마의 편의를 위한 실험"/>
           <p:cNvPicPr>
             <a:picLocks noChangeAspect="1"/>
           </p:cNvPicPr>
@@ -4774,7 +4831,7 @@
       <p:grpSpPr/>
       <p:pic>
         <p:nvPicPr>
-          <p:cNvPr id="2" name="Picture 1" descr="14. 실패 케이스 · 쇼츠 ott 플랫폼"/>
+          <p:cNvPr id="2" name="Picture 1" descr="14. 지속적인 실행을 약속합니다"/>
           <p:cNvPicPr>
             <a:picLocks noChangeAspect="1"/>
           </p:cNvPicPr>
@@ -4858,7 +4915,7 @@
       <p:grpSpPr/>
       <p:pic>
         <p:nvPicPr>
-          <p:cNvPr id="2" name="Picture 1" descr="2. 외주 개발사로 쌓아 온 경험"/>
+          <p:cNvPr id="2" name="Picture 1" descr="2. 외주 제작사로 쌓아 온 경험"/>
           <p:cNvPicPr>
             <a:picLocks noChangeAspect="1"/>
           </p:cNvPicPr>

--- a/event/deck.pptx
+++ b/event/deck.pptx
@@ -1105,7 +1105,7 @@
           <a:p/>
           <a:p>
             <a:r>
-              <a:t>중견기업, 대기업, 관공서, 대학교, 스타트업 등 다양한 규모의 업체들로부터 일을 받아 진행하고 있었습니다.</a:t>
+              <a:t>중견기업, 대기업, 관공서, 대학교, 스타트업 등 다양한 규모의 업체들로부터 일을 받아 진행하고 있습니다.</a:t>
             </a:r>
           </a:p>
           <a:p/>

--- a/event/deck.pptx
+++ b/event/deck.pptx
@@ -592,23 +592,19 @@
           <a:p/>
           <a:p>
             <a:r>
-              <a:t>123타이어는 타이어 쇼핑몰을 운영하고 계셨고, 타이어라는 제품 특성상 고객이 자신의 차량에 맞는 타이어를 찾아서 구매하기가 힘들어 고객센터 문의량이 많았고, 타이어를 사면 끝이 아니라 장착점까지 고객이 찾아서 신청해야하는 번거로움이 있어 이탈률이 높았습니다. 그래서 저희는 이 문제점을 고객이 자신의 차량번호만 입력해도 해당 차량에 맞는 타이어들을 맞춤추천해주고, 구매과정에서 해당 타이어를 장착할 장착점을 고를 수 있게 하여 구매 프로세스를 대폭 개선하였습니다. 이후로도 리뉴얼 이후 내부 운영적으로 생산성을 높이고, 고객 피드백을 받아 끊임없이 개선하는 등 클라이언트분과 저희가 함께 노력한 결과 리뉴얼 후 연매출이 63억에서 79억으로 약 24%가 올랐습니다. 현재도 자동차 용품 쇼핑몰로의 확장 등 많은 개선을 준비중에 있습니다.</a:t>
+              <a:t># 성공 케이스</a:t>
             </a:r>
           </a:p>
           <a:p/>
           <a:p>
             <a:r>
-              <a:t>[근거]</a:t>
-            </a:r>
-          </a:p>
-          <a:p>
-            <a:r>
-              <a:t>매출 비교 원본 2~3쪽: https://api.dashboard.honest-family.com/storage/uploads/2026/10/QumGXX8giKlaKLTvql0zyV4z.pdf</a:t>
-            </a:r>
-          </a:p>
-          <a:p>
-            <a:r>
-              <a:t>2024.9.9~2025.9.8 순매출 63.67억 원 / 2025.9.9~2026.9.8 순매출 79.31억 원. 24.6%는 반올림. 함께 진행한 개선 전후 비교이며 특정 기능의 단독 효과를 뜻하지 않음.</a:t>
+              <a:t>123타이어</a:t>
+            </a:r>
+          </a:p>
+          <a:p/>
+          <a:p>
+            <a:r>
+              <a:t>타이어 쇼핑몰을 운영하고 계셨고, 타이어라는 제품 특성상 고객이 자신의 차량에 맞는 타이어를 찾아서 구매하기가 힘들어 고객센터 문의량이 많았고, 타이어를 사면 끝이 아니라 장착점까지 고객이 찾아서 신청해야하는 번거로움이 있어 이탈률이 높았습니다. 그래서 저희는 이 문제점을 고객이 자신의 차량번호만 입력해도 해당 차량에 맞는 타이어들을 맞춤추천해주고, 구매과정에서 해당 타이어를 장착할 장착점을 고를 수 있게 하여 구매 프로세스를 대폭 개선하고 chatgpt 같은 ai 검색 채택률을 높이기 위해 geo 최적화 작업을 하는 등 리뉴얼 이후에도 고객, 내부 피드백을 통해 끊임없이 개선하여 함께 노력한 결과 리뉴얼 후 연매출이 63억에서 79억으로 약 24%가 올랐습니다. 현재도 타이어만 판매하는게 아닌 자동차 용품 쇼핑몰로의 확장 등 많은 개선을 준비중에 있습니다.</a:t>
             </a:r>
           </a:p>
         </p:txBody>
@@ -678,28 +674,13 @@
           <a:lstStyle/>
           <a:p>
             <a:r>
-              <a:t>blueprep은 sat라는 미국 시험에 대비하는 모의고사 시스템이었는데 신규 출시 후 여러 학원에 b2b 판매 및 한국에서 sat 시험을 준비하는 학생들에게 잘 팔릴거라 예상했는데, 예상과 달리 반응이 없었고, 미국에서는 반응이 있을가 광고타겟을 글로벌하게 늘려보니 의외로 동남아시아에서 반응이 좋았습니다. 이후 해외 고객이 좀 더 쾌적하게 이용할 수 있도록 서비스 이용 환경과 결제시스템을 개선했습니다. 출시 초기인 2024년에는 영문 상품의 달러 표시 결제 성공 주문액이 상반기 3만 6,155달러에서 하반기 12만 8,545달러로 약 255.5% 늘었습니다. 현재도 단어장 추가, 시험 종류 신설 등 많은 개선을 준비중에 있습니다.</a:t>
+              <a:t>blueprep</a:t>
             </a:r>
           </a:p>
           <a:p/>
           <a:p>
             <a:r>
-              <a:t>[근거]</a:t>
-            </a:r>
-          </a:p>
-          <a:p>
-            <a:r>
-              <a:t>2026.10.24 읽기 전용 주문 집계: https://dashboard.honest-family.com/projects/61</a:t>
-            </a:r>
-          </a:p>
-          <a:p>
-            <a:r>
-              <a:t>2024년 상반기 대비 하반기 영문 상품 달러 표시 결제 성공 주문액. 관리자 제외, 원화 주문 별도. 결제사 외부 환불·정산 미대조. 원고의 첫해·다음해 및 원화 환산 금액은 확인된 집계와 달라 기간·단위를 바로잡음. 동남아시아 고객 반응은 대표가 전달한 경험. 해당 지역 서버 별도 개설은 확인되지 않아 해외 이용 환경 개선으로 표현. 확인된 서버는 미국 동부이며 결제별 적용 시점이 달라 결제 변경만의 성장 효과로 단정하지 않음.</a:t>
-            </a:r>
-          </a:p>
-          <a:p>
-            <a:r>
-              <a:t>실제 화면: https://blueprep.com/ / https://blueprep.com/practices/26</a:t>
+              <a:t>sat라는 미국 시험에 대비하는 모의고사 시스템이었는데 신규 출시 후 여러 학원에 b2b 판매 및 한국에서 sat 시험을 준비하는 학생들에게 잘 팔릴거라 예상했는데, 예상과 달리 반응이 없었고, 미국에서는 반응이 있을가 광고타겟을 글로벌하게 늘려보니 의외로 미국보다 동남아시아에서 반응이 좋았고, 이후 동남아시아에서 해당 서비스를 좀 더 쾌적하게 이용할 수 있게 해당 지역 서버를 별도 개설 및 해당 국가에서 익숙한 결제시스템으로 결제시스템을 바꾸고 시험 외에도 이용할 이유를 제공하기 위해 단어장 시스템을 제공하는 등 여러 개선을 거쳐 오픈 후 첫해는 약 4,784만원이었지만 다음해에는 1억 7,019만원으로 약 255%가 상승했습니다. 현재도 시험 종류 신설 등 많은 개선을 준비중에 있습니다.</a:t>
             </a:r>
           </a:p>
         </p:txBody>
@@ -769,29 +750,19 @@
           <a:lstStyle/>
           <a:p>
             <a:r>
-              <a:t>뽀뽀뜨는 최근에 진행하고 있는 유아반찬 쇼핑몰로, 현재 두가지 가설을 실험중에 있습니다.</a:t>
+              <a:t>뽀뽀뜨</a:t>
             </a:r>
           </a:p>
           <a:p/>
           <a:p>
             <a:r>
-              <a:t>첫째는 구매패턴을 분석보니 신규고객이 첫구매 후 이탈하는 비율이 매우 높았고 이 중 특정 상품군들을 구매한 고객은 이탈 없이 재구매율을 높은것을 확인했습니다. 그래서 해당 상품군들을 따로 모아 별도 랜딩페이지를 만들어 홍보하고, 메인페이지에서도 해당 상품들이 잘 보이게 큐레이션 후 실제 재구매율이 높아지는지 모니터링 중입니다. 현재 해당 상품군들의 판매량이 약 37% 늘었지만 이게 과연 재구매까지로 이어져 실제 재구매율을 높이는지 3개월간 모니터링 예정입니다. 그리고 식단 기능을 넣어 엄마들이 스스로 상품을 찾아 헤매지 않게 직접 식단을 구성해 배송받기만 하면 되는 식단 기능을 개발중에 있습니다.</a:t>
+              <a:t>최근에 진행하고 있는 유아반찬 쇼핑몰로, 현재 두가지 가설을 실험중에 있습니다.</a:t>
             </a:r>
           </a:p>
           <a:p/>
           <a:p>
             <a:r>
-              <a:t>[근거]</a:t>
-            </a:r>
-          </a:p>
-          <a:p>
-            <a:r>
-              <a:t>주문 보관본을 재계산한 2026.10.24 조사: https://dashboard.honest-family.com/issues/1066</a:t>
-            </a:r>
-          </a:p>
-          <a:p>
-            <a:r>
-              <a:t>추천 상품 8종의 2026.8.31~9.20 정상 3주 주간 평균 122.7개 대비 10.12~10.18 169개. 판매량 37.8% 증가. 회사 전체 매출·재구매율의 증가가 아님. 3개월 모니터링과 식단 기능은 대표가 전달한 계획.</a:t>
+              <a:t>첫째는 구매패턴을 분석해보니 신규고객이 첫구매 후 이탈하는 비율이 매우 높았고 이 중 특정 상품군들을 구매한 고객은 재구매율이 높은것을 확인했습니다. 그래서 해당 상품군들을 따로 모아 별도 랜딩페이지를 만들어 홍보하고, 메인페이지에서도 해당 상품들이 잘 보이게 큐레이션 후 실제 재구매율이 높아지는지 모니터링 중입니다. 현재 해당 상품군들의 판매량이 약 37% 늘었지만 이게 과연 재구매까지로 이어져 실제 재구매율을 높이는지 3개월간 모니터링 예정입니다. 그리고 식단 기능을 넣어 엄마들이 스스로 상품을 찾느라 헤매지 않게 직접 식단을 구성해 배송받기만 하면 되는 식단 기능을 개발중에 있습니다.</a:t>
             </a:r>
           </a:p>
         </p:txBody>
@@ -861,29 +832,19 @@
           <a:lstStyle/>
           <a:p>
             <a:r>
-              <a:t>둘째는, 저출산 시대에 타업체들은 어떻게 매출을 올리는가 인사이트를 쌓던중 아이들이 알아서 쪽쪽 빨아먹을 수 있는 요거트, 여행을 갈 때도 쉽게 챙겨갈 수 있는 실온 이유식 등 엄마들을 편하게 해주는 상품들이 먹힌다는 생각이 들어 진행중이던 광고소재를 아이 중심이 아니라 엄마들도 저녁밥이라도 편하게 준비해라, 여유를 되찾으라는 등의 엄마 중심의 소재를 추가했더니 해당 소재가 반응이 좋다는것을 확인했습니다. 이로 인해 제품에 숟가락과 함께 담을 수 있는 다회용 뚜껑을 제공해 밖에 나가서 먹이기도 편하고, 한번에 다 먹지 못해도 다시 보관하기 편하게 하는 제품 개발과 한팩만으로도 한끼를 간편하게 먹일 수 있는 레시피를 추가하고 전면에 내세우는 등 많은 개선을 준비중에 있습니다.</a:t>
+              <a:t>둘째는, 저출산 시대에 타업체들은 어떻게 매출을 올리는가 인사이트를 쌓던중 아이들이 알아서 쪽쪽 빨아먹을 수 있는 요거트, 여행을 갈 때도 쉽게 챙겨갈 수 있는 실온 이유식 등 엄마들을 편하게 해주는 상품들이 먹힌다는 가설을 세워 진행중이던 광고소재를 아이 중심이 아니라 엄마들도 쉬세요, 저녁밥이라도 편하게 준비해라, 여유를 되찾으라는 등의 엄마 중심의 소재를 추가했더니 해당 소재가 반응이 좋다는것을 확인했습니다.</a:t>
             </a:r>
           </a:p>
           <a:p/>
           <a:p>
             <a:r>
+              <a:t>그래서 해당 가설을 토대로 이를 더 강화하기 위해 제품에 숟가락과 함께 담을 수 있는 다회용 뚜껑 상품을 개발해 별도 상품으로 판매해 밖에 나가서 먹이기도 편하고, 한번에 다 먹지 못해도 다시 보관하기 편하게 하는 만들 수 있게 로도 한끼를 간편하게 먹일 수 있는 레시피를 추가하고 전면에 내세우는 등 많은 개선을 준비중에 있습니다.</a:t>
+            </a:r>
+          </a:p>
+          <a:p/>
+          <a:p>
+            <a:r>
               <a:t>아직 뽀뽀뜨는 뚜렷한 매출 상승은 없지만 가만히 있지 않고 끊임없이 개선하다보면 결국은 매출상승으로 돌아올것이라 기대하고 있습니다.</a:t>
-            </a:r>
-          </a:p>
-          <a:p/>
-          <a:p>
-            <a:r>
-              <a:t>[근거]</a:t>
-            </a:r>
-          </a:p>
-          <a:p>
-            <a:r>
-              <a:t>광고 운영 기록: https://app.notion.com/p/3ffd0aa7612a81baaf74d1df6881043b</a:t>
-            </a:r>
-          </a:p>
-          <a:p>
-            <a:r>
-              <a:t>소재 반응과 제품·레시피 계획은 대표가 전달한 설명. 다회용 뚜껑·레시피는 준비 중이며 출시 완료가 아님. 전체 매출의 뚜렷한 상승은 아직 확인되지 않음.</a:t>
             </a:r>
           </a:p>
         </p:txBody>
@@ -1029,7 +990,7 @@
           <a:lstStyle/>
           <a:p>
             <a:r>
-              <a:t>실제로 저희가 우리 회사에 무엇을 해줄 수 있는지 들어보고 싶으신분들은 “어니스트패밀리”로 편하게 문의 부탁드립니다. 이상 발표 마치겠습니다 들어주셔서 감사합니다.</a:t>
+              <a:t>실제로 저희가 우리 회사에 무엇을 해줄 수 있는지 들어보고 싶으신분들은 QR코드를 스캔해 “어니스트패밀리”로 편하게 문의 부탁드립니다. 이상 발표 마치겠습니다 들어주셔서 감사합니다.</a:t>
             </a:r>
           </a:p>
         </p:txBody>
@@ -1108,12 +1069,6 @@
               <a:t>중견기업, 대기업, 관공서, 대학교, 스타트업 등 다양한 규모의 업체들로부터 일을 받아 진행하고 있습니다.</a:t>
             </a:r>
           </a:p>
-          <a:p/>
-          <a:p>
-            <a:r>
-              <a:t>한컴, 롯데, 현대글로비스의 프로젝트도 진행했습니다.</a:t>
-            </a:r>
-          </a:p>
         </p:txBody>
       </p:sp>
       <p:sp>
@@ -1461,7 +1416,7 @@
           <a:lstStyle/>
           <a:p>
             <a:r>
-              <a:t>그래서 저희는 고객분들께 진정한 가치를 제공하려면 어떻게 해야할가를 고민해본 결과 고객이만들어 달라는대로만 만드는 단순 외주가 아니라, 구상 단계에서부터 함께 하고 다 만든 뒤 사업의 성장까지도 돕는 실행 파트너가 되는것이 진정한 가치를 주는것이라 생각하고 사업성장연구소라는 컨셉으로 신사업을 진행하고 있습니다.</a:t>
+              <a:t>그래서 저희는 고객분들께 진정한 가치를 제공하려면 어떻게 해야할가를 고민해본 결과 고객이 만들어 달라는대로만 만드는 단순 외주가 아니라, 구상 단계에서부터 함께 하고 다 만든 뒤 사업의 성장까지도 돕는 실행 파트너가 되는것이 진정한 가치를 주는것이라 생각하고 사업성장연구소라는 컨셉으로 신사업을 진행하고 있습니다.</a:t>
             </a:r>
           </a:p>
         </p:txBody>

--- a/event/deck.pptx
+++ b/event/deck.pptx
@@ -762,7 +762,7 @@
           <a:p/>
           <a:p>
             <a:r>
-              <a:t>첫째는 구매패턴을 분석해보니 신규고객이 첫구매 후 이탈하는 비율이 매우 높았고 이 중 특정 상품군들을 구매한 고객은 재구매율이 높은것을 확인했습니다. 그래서 해당 상품군들을 따로 모아 별도 랜딩페이지를 만들어 홍보하고, 메인페이지에서도 해당 상품들이 잘 보이게 큐레이션 후 실제 재구매율이 높아지는지 모니터링 중입니다. 현재 해당 상품군들의 판매량이 약 37% 늘었지만 이게 과연 재구매까지로 이어져 실제 재구매율을 높이는지 3개월간 모니터링 예정입니다. 그리고 식단 기능을 넣어 엄마들이 스스로 상품을 찾느라 헤매지 않게 직접 식단을 구성해 배송받기만 하면 되는 식단 기능을 개발중에 있습니다.</a:t>
+              <a:t>첫째는 구매패턴을 분석해보니 신규고객이 첫구매 후 이탈하는 비율이 매우 높았고 이 중 특정 상품군들을 구매한 고객은 재구매율이 높은것을 확인했습니다. 그래서 해당 상품군들을 따로 모아 별도 랜딩페이지를 만들어 홍보하고, 메인페이지에서도 해당 상품들이 잘 보이게 큐레이션 후 실제 재구매율이 높아지는지 모니터링 중입니다. 현재 해당 상품군들의 판매량이 약 37% 늘었지만 전체 매출은 그대로였고, 이게 과연 재구매까지로 이어져 실제 재구매율을 높이는지 3개월간 모니터링 예정입니다. 그리고 식단 기능을 넣어 엄마들이 스스로 상품을 구성하느라 헤매지 않고 배송받기만 하면 되는 식단 기능을 개발중에 있습니다.</a:t>
             </a:r>
           </a:p>
         </p:txBody>

--- a/event/deck.pptx
+++ b/event/deck.pptx
@@ -1066,7 +1066,7 @@
           <a:p/>
           <a:p>
             <a:r>
-              <a:t>중견기업, 대기업, 관공서, 대학교, 스타트업 등 다양한 규모의 업체들로부터 일을 받아 진행하고 있습니다.</a:t>
+              <a:t>스타트업, 중견기업, 대기업, 관공서, 대학교  등 다양한 규모의 업체들로부터 일을 받아 진행하고 있습니다.</a:t>
             </a:r>
           </a:p>
         </p:txBody>
